--- a/deliverables/项目验收汇报_审查修订版_箭头修复版.pptx
+++ b/deliverables/项目验收汇报_审查修订版_箭头修复版.pptx
@@ -5696,6 +5696,114 @@
           </a:prstGeom>
         </p:spPr>
       </p:pic>
+      <p:sp xmlns:a="http://schemas.openxmlformats.org/drawingml/2006/main">
+        <p:nvSpPr>
+          <p:cNvPr id="14" name="Rounded Rectangle 13"/>
+          <p:cNvSpPr/>
+          <p:nvPr/>
+        </p:nvSpPr>
+        <p:spPr>
+          <a:xfrm>
+            <a:off x="7882127" y="2761488"/>
+            <a:ext cx="566928" cy="512064"/>
+          </a:xfrm>
+          <a:prstGeom prst="roundRect">
+            <a:avLst/>
+          </a:prstGeom>
+          <a:solidFill>
+            <a:srgbClr val="081A2C"/>
+          </a:solidFill>
+          <a:ln w="17780">
+            <a:solidFill>
+              <a:srgbClr val="FFAE63"/>
+            </a:solidFill>
+          </a:ln>
+        </p:spPr>
+        <p:style>
+          <a:lnRef idx="1">
+            <a:schemeClr val="accent1"/>
+          </a:lnRef>
+          <a:fillRef idx="3">
+            <a:schemeClr val="accent1"/>
+          </a:fillRef>
+          <a:effectRef idx="2">
+            <a:schemeClr val="accent1"/>
+          </a:effectRef>
+          <a:fontRef idx="minor">
+            <a:schemeClr val="lt1"/>
+          </a:fontRef>
+        </p:style>
+        <p:txBody>
+          <a:bodyPr rtlCol="0" anchor="ctr" lIns="9144" rIns="9144" tIns="0" bIns="0"/>
+          <a:lstStyle/>
+          <a:p>
+            <a:pPr algn="ctr"/>
+            <a:r>
+              <a:rPr sz="1300" b="1">
+                <a:solidFill>
+                  <a:srgbClr val="FFAE63"/>
+                </a:solidFill>
+                <a:latin typeface="Microsoft YaHei"/>
+              </a:rPr>
+              <a:t>停顿</a:t>
+            </a:r>
+          </a:p>
+        </p:txBody>
+      </p:sp>
+      <p:sp xmlns:a="http://schemas.openxmlformats.org/drawingml/2006/main">
+        <p:nvSpPr>
+          <p:cNvPr id="15" name="Rounded Rectangle 14"/>
+          <p:cNvSpPr/>
+          <p:nvPr/>
+        </p:nvSpPr>
+        <p:spPr>
+          <a:xfrm>
+            <a:off x="7882127" y="3986784"/>
+            <a:ext cx="566928" cy="512064"/>
+          </a:xfrm>
+          <a:prstGeom prst="roundRect">
+            <a:avLst/>
+          </a:prstGeom>
+          <a:solidFill>
+            <a:srgbClr val="081A2C"/>
+          </a:solidFill>
+          <a:ln w="17780">
+            <a:solidFill>
+              <a:srgbClr val="71FFD7"/>
+            </a:solidFill>
+          </a:ln>
+        </p:spPr>
+        <p:style>
+          <a:lnRef idx="1">
+            <a:schemeClr val="accent1"/>
+          </a:lnRef>
+          <a:fillRef idx="3">
+            <a:schemeClr val="accent1"/>
+          </a:fillRef>
+          <a:effectRef idx="2">
+            <a:schemeClr val="accent1"/>
+          </a:effectRef>
+          <a:fontRef idx="minor">
+            <a:schemeClr val="lt1"/>
+          </a:fontRef>
+        </p:style>
+        <p:txBody>
+          <a:bodyPr rtlCol="0" anchor="ctr" lIns="9144" rIns="9144" tIns="0" bIns="0"/>
+          <a:lstStyle/>
+          <a:p>
+            <a:pPr algn="ctr"/>
+            <a:r>
+              <a:rPr sz="1300" b="1">
+                <a:solidFill>
+                  <a:srgbClr val="71FFD7"/>
+                </a:solidFill>
+                <a:latin typeface="Microsoft YaHei"/>
+              </a:rPr>
+              <a:t>填充</a:t>
+            </a:r>
+          </a:p>
+        </p:txBody>
+      </p:sp>
     </p:spTree>
     <p:extLst>
       <p:ext uri="{BB962C8B-B14F-4D97-AF65-F5344CB8AC3E}">
@@ -7195,6 +7303,346 @@
           <a:xfrm flipV="1">
             <a:off x="7059168" y="3779215"/>
             <a:ext cx="209397" cy="137160"/>
+          </a:xfrm>
+          <a:prstGeom prst="line">
+            <a:avLst/>
+          </a:prstGeom>
+          <a:ln w="28575">
+            <a:solidFill>
+              <a:srgbClr val="71FFD7"/>
+            </a:solidFill>
+          </a:ln>
+        </p:spPr>
+        <p:style>
+          <a:lnRef idx="2">
+            <a:schemeClr val="accent1"/>
+          </a:lnRef>
+          <a:fillRef idx="0">
+            <a:schemeClr val="accent1"/>
+          </a:fillRef>
+          <a:effectRef idx="1">
+            <a:schemeClr val="accent1"/>
+          </a:effectRef>
+          <a:fontRef idx="minor">
+            <a:schemeClr val="tx1"/>
+          </a:fontRef>
+        </p:style>
+      </p:cxnSp>
+      <p:pic xmlns:a="http://schemas.openxmlformats.org/drawingml/2006/main" xmlns:r="http://schemas.openxmlformats.org/officeDocument/2006/relationships">
+        <p:nvPicPr>
+          <p:cNvPr id="22" name="Picture 21" descr="image.jpeg"/>
+          <p:cNvPicPr>
+            <a:picLocks noChangeAspect="1"/>
+          </p:cNvPicPr>
+          <p:nvPr/>
+        </p:nvPicPr>
+        <p:blipFill>
+          <a:blip r:embed="R7e41b25a32bb4ecb"/>
+          <a:srcRect l="27225" r="68462" t="42667" b="32600"/>
+          <a:stretch>
+            <a:fillRect/>
+          </a:stretch>
+        </p:blipFill>
+        <p:spPr>
+          <a:xfrm>
+            <a:off x="3319272" y="2926080"/>
+            <a:ext cx="525780" cy="1696211"/>
+          </a:xfrm>
+          <a:prstGeom prst="rect">
+            <a:avLst/>
+          </a:prstGeom>
+        </p:spPr>
+      </p:pic>
+      <p:cxnSp xmlns:a="http://schemas.openxmlformats.org/drawingml/2006/main">
+        <p:nvCxnSpPr>
+          <p:cNvPr id="23" name="Connector 22"/>
+          <p:cNvCxnSpPr/>
+          <p:nvPr/>
+        </p:nvCxnSpPr>
+        <p:spPr>
+          <a:xfrm>
+            <a:off x="3300984" y="3779215"/>
+            <a:ext cx="201168" cy="0"/>
+          </a:xfrm>
+          <a:prstGeom prst="line">
+            <a:avLst/>
+          </a:prstGeom>
+          <a:ln w="28575">
+            <a:solidFill>
+              <a:srgbClr val="71FFD7"/>
+            </a:solidFill>
+          </a:ln>
+        </p:spPr>
+        <p:style>
+          <a:lnRef idx="2">
+            <a:schemeClr val="accent1"/>
+          </a:lnRef>
+          <a:fillRef idx="0">
+            <a:schemeClr val="accent1"/>
+          </a:fillRef>
+          <a:effectRef idx="1">
+            <a:schemeClr val="accent1"/>
+          </a:effectRef>
+          <a:fontRef idx="minor">
+            <a:schemeClr val="tx1"/>
+          </a:fontRef>
+        </p:style>
+      </p:cxnSp>
+      <p:cxnSp xmlns:a="http://schemas.openxmlformats.org/drawingml/2006/main">
+        <p:nvCxnSpPr>
+          <p:cNvPr id="24" name="Connector 23"/>
+          <p:cNvCxnSpPr/>
+          <p:nvPr/>
+        </p:nvCxnSpPr>
+        <p:spPr>
+          <a:xfrm>
+            <a:off x="3502152" y="3007461"/>
+            <a:ext cx="0" cy="771754"/>
+          </a:xfrm>
+          <a:prstGeom prst="line">
+            <a:avLst/>
+          </a:prstGeom>
+          <a:ln w="28575">
+            <a:solidFill>
+              <a:srgbClr val="71FFD7"/>
+            </a:solidFill>
+          </a:ln>
+        </p:spPr>
+        <p:style>
+          <a:lnRef idx="2">
+            <a:schemeClr val="accent1"/>
+          </a:lnRef>
+          <a:fillRef idx="0">
+            <a:schemeClr val="accent1"/>
+          </a:fillRef>
+          <a:effectRef idx="1">
+            <a:schemeClr val="accent1"/>
+          </a:effectRef>
+          <a:fontRef idx="minor">
+            <a:schemeClr val="tx1"/>
+          </a:fontRef>
+        </p:style>
+      </p:cxnSp>
+      <p:cxnSp xmlns:a="http://schemas.openxmlformats.org/drawingml/2006/main">
+        <p:nvCxnSpPr>
+          <p:cNvPr id="25" name="Connector 24"/>
+          <p:cNvCxnSpPr/>
+          <p:nvPr/>
+        </p:nvCxnSpPr>
+        <p:spPr>
+          <a:xfrm>
+            <a:off x="3502152" y="3779215"/>
+            <a:ext cx="0" cy="772668"/>
+          </a:xfrm>
+          <a:prstGeom prst="line">
+            <a:avLst/>
+          </a:prstGeom>
+          <a:ln w="28575">
+            <a:solidFill>
+              <a:srgbClr val="71FFD7"/>
+            </a:solidFill>
+          </a:ln>
+        </p:spPr>
+        <p:style>
+          <a:lnRef idx="2">
+            <a:schemeClr val="accent1"/>
+          </a:lnRef>
+          <a:fillRef idx="0">
+            <a:schemeClr val="accent1"/>
+          </a:fillRef>
+          <a:effectRef idx="1">
+            <a:schemeClr val="accent1"/>
+          </a:effectRef>
+          <a:fontRef idx="minor">
+            <a:schemeClr val="tx1"/>
+          </a:fontRef>
+        </p:style>
+      </p:cxnSp>
+      <p:cxnSp xmlns:a="http://schemas.openxmlformats.org/drawingml/2006/main">
+        <p:nvCxnSpPr>
+          <p:cNvPr id="26" name="Connector 25"/>
+          <p:cNvCxnSpPr/>
+          <p:nvPr/>
+        </p:nvCxnSpPr>
+        <p:spPr>
+          <a:xfrm>
+            <a:off x="3502152" y="3007461"/>
+            <a:ext cx="182880" cy="0"/>
+          </a:xfrm>
+          <a:prstGeom prst="line">
+            <a:avLst/>
+          </a:prstGeom>
+          <a:ln w="28575">
+            <a:solidFill>
+              <a:srgbClr val="71FFD7"/>
+            </a:solidFill>
+          </a:ln>
+        </p:spPr>
+        <p:style>
+          <a:lnRef idx="2">
+            <a:schemeClr val="accent1"/>
+          </a:lnRef>
+          <a:fillRef idx="0">
+            <a:schemeClr val="accent1"/>
+          </a:fillRef>
+          <a:effectRef idx="1">
+            <a:schemeClr val="accent1"/>
+          </a:effectRef>
+          <a:fontRef idx="minor">
+            <a:schemeClr val="tx1"/>
+          </a:fontRef>
+        </p:style>
+      </p:cxnSp>
+      <p:cxnSp xmlns:a="http://schemas.openxmlformats.org/drawingml/2006/main">
+        <p:nvCxnSpPr>
+          <p:cNvPr id="27" name="Connector 26"/>
+          <p:cNvCxnSpPr/>
+          <p:nvPr/>
+        </p:nvCxnSpPr>
+        <p:spPr>
+          <a:xfrm>
+            <a:off x="3685032" y="2906877"/>
+            <a:ext cx="164592" cy="100584"/>
+          </a:xfrm>
+          <a:prstGeom prst="line">
+            <a:avLst/>
+          </a:prstGeom>
+          <a:ln w="28575">
+            <a:solidFill>
+              <a:srgbClr val="71FFD7"/>
+            </a:solidFill>
+          </a:ln>
+        </p:spPr>
+        <p:style>
+          <a:lnRef idx="2">
+            <a:schemeClr val="accent1"/>
+          </a:lnRef>
+          <a:fillRef idx="0">
+            <a:schemeClr val="accent1"/>
+          </a:fillRef>
+          <a:effectRef idx="1">
+            <a:schemeClr val="accent1"/>
+          </a:effectRef>
+          <a:fontRef idx="minor">
+            <a:schemeClr val="tx1"/>
+          </a:fontRef>
+        </p:style>
+      </p:cxnSp>
+      <p:cxnSp xmlns:a="http://schemas.openxmlformats.org/drawingml/2006/main">
+        <p:nvCxnSpPr>
+          <p:cNvPr id="28" name="Connector 27"/>
+          <p:cNvCxnSpPr/>
+          <p:nvPr/>
+        </p:nvCxnSpPr>
+        <p:spPr>
+          <a:xfrm flipV="1">
+            <a:off x="3685032" y="3007461"/>
+            <a:ext cx="164592" cy="100584"/>
+          </a:xfrm>
+          <a:prstGeom prst="line">
+            <a:avLst/>
+          </a:prstGeom>
+          <a:ln w="28575">
+            <a:solidFill>
+              <a:srgbClr val="71FFD7"/>
+            </a:solidFill>
+          </a:ln>
+        </p:spPr>
+        <p:style>
+          <a:lnRef idx="2">
+            <a:schemeClr val="accent1"/>
+          </a:lnRef>
+          <a:fillRef idx="0">
+            <a:schemeClr val="accent1"/>
+          </a:fillRef>
+          <a:effectRef idx="1">
+            <a:schemeClr val="accent1"/>
+          </a:effectRef>
+          <a:fontRef idx="minor">
+            <a:schemeClr val="tx1"/>
+          </a:fontRef>
+        </p:style>
+      </p:cxnSp>
+      <p:cxnSp xmlns:a="http://schemas.openxmlformats.org/drawingml/2006/main">
+        <p:nvCxnSpPr>
+          <p:cNvPr id="29" name="Connector 28"/>
+          <p:cNvCxnSpPr/>
+          <p:nvPr/>
+        </p:nvCxnSpPr>
+        <p:spPr>
+          <a:xfrm>
+            <a:off x="3502152" y="4551883"/>
+            <a:ext cx="182880" cy="0"/>
+          </a:xfrm>
+          <a:prstGeom prst="line">
+            <a:avLst/>
+          </a:prstGeom>
+          <a:ln w="28575">
+            <a:solidFill>
+              <a:srgbClr val="71FFD7"/>
+            </a:solidFill>
+          </a:ln>
+        </p:spPr>
+        <p:style>
+          <a:lnRef idx="2">
+            <a:schemeClr val="accent1"/>
+          </a:lnRef>
+          <a:fillRef idx="0">
+            <a:schemeClr val="accent1"/>
+          </a:fillRef>
+          <a:effectRef idx="1">
+            <a:schemeClr val="accent1"/>
+          </a:effectRef>
+          <a:fontRef idx="minor">
+            <a:schemeClr val="tx1"/>
+          </a:fontRef>
+        </p:style>
+      </p:cxnSp>
+      <p:cxnSp xmlns:a="http://schemas.openxmlformats.org/drawingml/2006/main">
+        <p:nvCxnSpPr>
+          <p:cNvPr id="30" name="Connector 29"/>
+          <p:cNvCxnSpPr/>
+          <p:nvPr/>
+        </p:nvCxnSpPr>
+        <p:spPr>
+          <a:xfrm>
+            <a:off x="3685032" y="4451299"/>
+            <a:ext cx="164592" cy="100584"/>
+          </a:xfrm>
+          <a:prstGeom prst="line">
+            <a:avLst/>
+          </a:prstGeom>
+          <a:ln w="28575">
+            <a:solidFill>
+              <a:srgbClr val="71FFD7"/>
+            </a:solidFill>
+          </a:ln>
+        </p:spPr>
+        <p:style>
+          <a:lnRef idx="2">
+            <a:schemeClr val="accent1"/>
+          </a:lnRef>
+          <a:fillRef idx="0">
+            <a:schemeClr val="accent1"/>
+          </a:fillRef>
+          <a:effectRef idx="1">
+            <a:schemeClr val="accent1"/>
+          </a:effectRef>
+          <a:fontRef idx="minor">
+            <a:schemeClr val="tx1"/>
+          </a:fontRef>
+        </p:style>
+      </p:cxnSp>
+      <p:cxnSp xmlns:a="http://schemas.openxmlformats.org/drawingml/2006/main">
+        <p:nvCxnSpPr>
+          <p:cNvPr id="31" name="Connector 30"/>
+          <p:cNvCxnSpPr/>
+          <p:nvPr/>
+        </p:nvCxnSpPr>
+        <p:spPr>
+          <a:xfrm flipV="1">
+            <a:off x="3685032" y="4551883"/>
+            <a:ext cx="164592" cy="100584"/>
           </a:xfrm>
           <a:prstGeom prst="line">
             <a:avLst/>
@@ -18870,6 +19318,178 @@
           </a:p>
         </p:txBody>
       </p:sp>
+      <p:sp xmlns:a="http://schemas.openxmlformats.org/drawingml/2006/main">
+        <p:nvSpPr>
+          <p:cNvPr id="33" name="Right Arrow 32"/>
+          <p:cNvSpPr/>
+          <p:nvPr/>
+        </p:nvSpPr>
+        <p:spPr>
+          <a:xfrm>
+            <a:off x="2457450" y="2441638"/>
+            <a:ext cx="495300" cy="155448"/>
+          </a:xfrm>
+          <a:prstGeom prst="rightArrow">
+            <a:avLst/>
+          </a:prstGeom>
+          <a:solidFill>
+            <a:srgbClr val="71FFD7"/>
+          </a:solidFill>
+          <a:ln>
+            <a:noFill/>
+          </a:ln>
+        </p:spPr>
+        <p:style>
+          <a:lnRef idx="1">
+            <a:schemeClr val="accent1"/>
+          </a:lnRef>
+          <a:fillRef idx="3">
+            <a:schemeClr val="accent1"/>
+          </a:fillRef>
+          <a:effectRef idx="2">
+            <a:schemeClr val="accent1"/>
+          </a:effectRef>
+          <a:fontRef idx="minor">
+            <a:schemeClr val="lt1"/>
+          </a:fontRef>
+        </p:style>
+        <p:txBody>
+          <a:bodyPr rtlCol="0" anchor="ctr"/>
+          <a:lstStyle/>
+          <a:p>
+            <a:pPr algn="ctr"/>
+          </a:p>
+        </p:txBody>
+      </p:sp>
+      <p:sp xmlns:a="http://schemas.openxmlformats.org/drawingml/2006/main">
+        <p:nvSpPr>
+          <p:cNvPr id="34" name="Right Arrow 33"/>
+          <p:cNvSpPr/>
+          <p:nvPr/>
+        </p:nvSpPr>
+        <p:spPr>
+          <a:xfrm>
+            <a:off x="4762500" y="2441638"/>
+            <a:ext cx="495300" cy="155448"/>
+          </a:xfrm>
+          <a:prstGeom prst="rightArrow">
+            <a:avLst/>
+          </a:prstGeom>
+          <a:solidFill>
+            <a:srgbClr val="71FFD7"/>
+          </a:solidFill>
+          <a:ln>
+            <a:noFill/>
+          </a:ln>
+        </p:spPr>
+        <p:style>
+          <a:lnRef idx="1">
+            <a:schemeClr val="accent1"/>
+          </a:lnRef>
+          <a:fillRef idx="3">
+            <a:schemeClr val="accent1"/>
+          </a:fillRef>
+          <a:effectRef idx="2">
+            <a:schemeClr val="accent1"/>
+          </a:effectRef>
+          <a:fontRef idx="minor">
+            <a:schemeClr val="lt1"/>
+          </a:fontRef>
+        </p:style>
+        <p:txBody>
+          <a:bodyPr rtlCol="0" anchor="ctr"/>
+          <a:lstStyle/>
+          <a:p>
+            <a:pPr algn="ctr"/>
+          </a:p>
+        </p:txBody>
+      </p:sp>
+      <p:sp xmlns:a="http://schemas.openxmlformats.org/drawingml/2006/main">
+        <p:nvSpPr>
+          <p:cNvPr id="35" name="Right Arrow 34"/>
+          <p:cNvSpPr/>
+          <p:nvPr/>
+        </p:nvSpPr>
+        <p:spPr>
+          <a:xfrm>
+            <a:off x="7067550" y="2441638"/>
+            <a:ext cx="495300" cy="155448"/>
+          </a:xfrm>
+          <a:prstGeom prst="rightArrow">
+            <a:avLst/>
+          </a:prstGeom>
+          <a:solidFill>
+            <a:srgbClr val="71FFD7"/>
+          </a:solidFill>
+          <a:ln>
+            <a:noFill/>
+          </a:ln>
+        </p:spPr>
+        <p:style>
+          <a:lnRef idx="1">
+            <a:schemeClr val="accent1"/>
+          </a:lnRef>
+          <a:fillRef idx="3">
+            <a:schemeClr val="accent1"/>
+          </a:fillRef>
+          <a:effectRef idx="2">
+            <a:schemeClr val="accent1"/>
+          </a:effectRef>
+          <a:fontRef idx="minor">
+            <a:schemeClr val="lt1"/>
+          </a:fontRef>
+        </p:style>
+        <p:txBody>
+          <a:bodyPr rtlCol="0" anchor="ctr"/>
+          <a:lstStyle/>
+          <a:p>
+            <a:pPr algn="ctr"/>
+          </a:p>
+        </p:txBody>
+      </p:sp>
+      <p:sp xmlns:a="http://schemas.openxmlformats.org/drawingml/2006/main">
+        <p:nvSpPr>
+          <p:cNvPr id="36" name="Right Arrow 35"/>
+          <p:cNvSpPr/>
+          <p:nvPr/>
+        </p:nvSpPr>
+        <p:spPr>
+          <a:xfrm>
+            <a:off x="9372600" y="2441638"/>
+            <a:ext cx="495300" cy="155448"/>
+          </a:xfrm>
+          <a:prstGeom prst="rightArrow">
+            <a:avLst/>
+          </a:prstGeom>
+          <a:solidFill>
+            <a:srgbClr val="71FFD7"/>
+          </a:solidFill>
+          <a:ln>
+            <a:noFill/>
+          </a:ln>
+        </p:spPr>
+        <p:style>
+          <a:lnRef idx="1">
+            <a:schemeClr val="accent1"/>
+          </a:lnRef>
+          <a:fillRef idx="3">
+            <a:schemeClr val="accent1"/>
+          </a:fillRef>
+          <a:effectRef idx="2">
+            <a:schemeClr val="accent1"/>
+          </a:effectRef>
+          <a:fontRef idx="minor">
+            <a:schemeClr val="lt1"/>
+          </a:fontRef>
+        </p:style>
+        <p:txBody>
+          <a:bodyPr rtlCol="0" anchor="ctr"/>
+          <a:lstStyle/>
+          <a:p>
+            <a:pPr algn="ctr"/>
+          </a:p>
+        </p:txBody>
+      </p:sp>
       <p:sp>
         <p:nvSpPr>
           <p:cNvPr id="6" name="">
@@ -18974,102 +19594,6 @@
       </p:sp>
       <p:sp>
         <p:nvSpPr>
-          <p:cNvPr id="8" name="">
-            <a:extLst xmlns:a="http://schemas.openxmlformats.org/drawingml/2006/main">
-              <a:ext uri="{FF2B5EF4-FFF2-40B4-BE49-F238E27FC236}">
-                <a16:creationId xmlns:a16="http://schemas.microsoft.com/office/drawing/2014/main" id="{28AECB6E-1356-43D0-8B39-6DE014EDBC20}"/>
-              </a:ext>
-            </a:extLst>
-          </p:cNvPr>
-          <p:cNvSpPr>
-            <a:spLocks xmlns:a="http://schemas.openxmlformats.org/drawingml/2006/main" noGrp="1"/>
-          </p:cNvSpPr>
-          <p:nvPr/>
-        </p:nvSpPr>
-        <p:spPr>
-          <a:xfrm xmlns:a="http://schemas.openxmlformats.org/drawingml/2006/main">
-            <a:off x="2505075" y="2524125"/>
-            <a:ext cx="381000" cy="19050"/>
-          </a:xfrm>
-          <a:prstGeom xmlns:a="http://schemas.openxmlformats.org/drawingml/2006/main" prst="rect">
-            <a:avLst/>
-          </a:prstGeom>
-          <a:solidFill xmlns:a="http://schemas.openxmlformats.org/drawingml/2006/main">
-            <a:srgbClr val="F5F7FF">
-              <a:alpha val="52000"/>
-            </a:srgbClr>
-          </a:solidFill>
-          <a:ln xmlns:a="http://schemas.openxmlformats.org/drawingml/2006/main" w="0">
-            <a:noFill/>
-            <a:prstDash val="solid"/>
-          </a:ln>
-        </p:spPr>
-        <p:txBody>
-          <a:bodyPr xmlns:a="http://schemas.openxmlformats.org/drawingml/2006/main"/>
-          <a:lstStyle xmlns:a="http://schemas.openxmlformats.org/drawingml/2006/main"/>
-          <a:p xmlns:a="http://schemas.openxmlformats.org/drawingml/2006/main"/>
-        </p:txBody>
-      </p:sp>
-      <p:sp>
-        <p:nvSpPr>
-          <p:cNvPr id="9" name="">
-            <a:extLst xmlns:a="http://schemas.openxmlformats.org/drawingml/2006/main">
-              <a:ext uri="{FF2B5EF4-FFF2-40B4-BE49-F238E27FC236}">
-                <a16:creationId xmlns:a16="http://schemas.microsoft.com/office/drawing/2014/main" id="{C2065078-D19D-4634-9642-9B183D9A95D4}"/>
-              </a:ext>
-            </a:extLst>
-          </p:cNvPr>
-          <p:cNvSpPr>
-            <a:spLocks xmlns:a="http://schemas.openxmlformats.org/drawingml/2006/main" noGrp="1"/>
-          </p:cNvSpPr>
-          <p:nvPr/>
-        </p:nvSpPr>
-        <p:spPr>
-          <a:xfrm xmlns:a="http://schemas.openxmlformats.org/drawingml/2006/main">
-            <a:off x="2777490" y="2252472"/>
-            <a:ext cx="238125" cy="400050"/>
-          </a:xfrm>
-          <a:prstGeom xmlns:a="http://schemas.openxmlformats.org/drawingml/2006/main" prst="rect">
-            <a:avLst/>
-          </a:prstGeom>
-          <a:noFill xmlns:a="http://schemas.openxmlformats.org/drawingml/2006/main"/>
-          <a:ln xmlns:a="http://schemas.openxmlformats.org/drawingml/2006/main" w="0">
-            <a:noFill/>
-          </a:ln>
-        </p:spPr>
-        <p:txBody>
-          <a:bodyPr xmlns:a="http://schemas.openxmlformats.org/drawingml/2006/main">
-            <a:noAutofit/>
-          </a:bodyPr>
-          <a:lstStyle xmlns:a="http://schemas.openxmlformats.org/drawingml/2006/main"/>
-          <a:p xmlns:a="http://schemas.openxmlformats.org/drawingml/2006/main">
-            <a:pPr>
-              <a:buNone/>
-              <a:defRPr sz="2550" b="1">
-                <a:solidFill>
-                  <a:srgbClr val="7CFFCB"/>
-                </a:solidFill>
-                <a:latin typeface="Microsoft YaHei"/>
-                <a:ea typeface="Microsoft YaHei"/>
-                <a:cs typeface="Microsoft YaHei"/>
-              </a:defRPr>
-            </a:pPr>
-            <a:r>
-              <a:rPr sz="2550" b="1">
-                <a:solidFill>
-                  <a:srgbClr val="7CFFCB"/>
-                </a:solidFill>
-                <a:latin typeface="Microsoft YaHei"/>
-                <a:ea typeface="Microsoft YaHei"/>
-                <a:cs typeface="Microsoft YaHei"/>
-              </a:rPr>
-              <a:t>›</a:t>
-            </a:r>
-          </a:p>
-        </p:txBody>
-      </p:sp>
-      <p:sp>
-        <p:nvSpPr>
           <p:cNvPr id="10" name="">
             <a:extLst xmlns:a="http://schemas.openxmlformats.org/drawingml/2006/main">
               <a:ext uri="{FF2B5EF4-FFF2-40B4-BE49-F238E27FC236}">
@@ -19172,102 +19696,6 @@
       </p:sp>
       <p:sp>
         <p:nvSpPr>
-          <p:cNvPr id="12" name="">
-            <a:extLst xmlns:a="http://schemas.openxmlformats.org/drawingml/2006/main">
-              <a:ext uri="{FF2B5EF4-FFF2-40B4-BE49-F238E27FC236}">
-                <a16:creationId xmlns:a16="http://schemas.microsoft.com/office/drawing/2014/main" id="{DC20B257-AAA4-41B2-AC58-F125F0040E69}"/>
-              </a:ext>
-            </a:extLst>
-          </p:cNvPr>
-          <p:cNvSpPr>
-            <a:spLocks xmlns:a="http://schemas.openxmlformats.org/drawingml/2006/main" noGrp="1"/>
-          </p:cNvSpPr>
-          <p:nvPr/>
-        </p:nvSpPr>
-        <p:spPr>
-          <a:xfrm xmlns:a="http://schemas.openxmlformats.org/drawingml/2006/main">
-            <a:off x="4810125" y="2524125"/>
-            <a:ext cx="381000" cy="19050"/>
-          </a:xfrm>
-          <a:prstGeom xmlns:a="http://schemas.openxmlformats.org/drawingml/2006/main" prst="rect">
-            <a:avLst/>
-          </a:prstGeom>
-          <a:solidFill xmlns:a="http://schemas.openxmlformats.org/drawingml/2006/main">
-            <a:srgbClr val="F5F7FF">
-              <a:alpha val="52000"/>
-            </a:srgbClr>
-          </a:solidFill>
-          <a:ln xmlns:a="http://schemas.openxmlformats.org/drawingml/2006/main" w="0">
-            <a:noFill/>
-            <a:prstDash val="solid"/>
-          </a:ln>
-        </p:spPr>
-        <p:txBody>
-          <a:bodyPr xmlns:a="http://schemas.openxmlformats.org/drawingml/2006/main"/>
-          <a:lstStyle xmlns:a="http://schemas.openxmlformats.org/drawingml/2006/main"/>
-          <a:p xmlns:a="http://schemas.openxmlformats.org/drawingml/2006/main"/>
-        </p:txBody>
-      </p:sp>
-      <p:sp>
-        <p:nvSpPr>
-          <p:cNvPr id="13" name="">
-            <a:extLst xmlns:a="http://schemas.openxmlformats.org/drawingml/2006/main">
-              <a:ext uri="{FF2B5EF4-FFF2-40B4-BE49-F238E27FC236}">
-                <a16:creationId xmlns:a16="http://schemas.microsoft.com/office/drawing/2014/main" id="{5E17F7AB-12CD-4D26-89E4-967D122D58B9}"/>
-              </a:ext>
-            </a:extLst>
-          </p:cNvPr>
-          <p:cNvSpPr>
-            <a:spLocks xmlns:a="http://schemas.openxmlformats.org/drawingml/2006/main" noGrp="1"/>
-          </p:cNvSpPr>
-          <p:nvPr/>
-        </p:nvSpPr>
-        <p:spPr>
-          <a:xfrm xmlns:a="http://schemas.openxmlformats.org/drawingml/2006/main">
-            <a:off x="5082540" y="2252472"/>
-            <a:ext cx="238125" cy="400050"/>
-          </a:xfrm>
-          <a:prstGeom xmlns:a="http://schemas.openxmlformats.org/drawingml/2006/main" prst="rect">
-            <a:avLst/>
-          </a:prstGeom>
-          <a:noFill xmlns:a="http://schemas.openxmlformats.org/drawingml/2006/main"/>
-          <a:ln xmlns:a="http://schemas.openxmlformats.org/drawingml/2006/main" w="0">
-            <a:noFill/>
-          </a:ln>
-        </p:spPr>
-        <p:txBody>
-          <a:bodyPr xmlns:a="http://schemas.openxmlformats.org/drawingml/2006/main">
-            <a:noAutofit/>
-          </a:bodyPr>
-          <a:lstStyle xmlns:a="http://schemas.openxmlformats.org/drawingml/2006/main"/>
-          <a:p xmlns:a="http://schemas.openxmlformats.org/drawingml/2006/main">
-            <a:pPr>
-              <a:buNone/>
-              <a:defRPr sz="2550" b="1">
-                <a:solidFill>
-                  <a:srgbClr val="7CFFCB"/>
-                </a:solidFill>
-                <a:latin typeface="Microsoft YaHei"/>
-                <a:ea typeface="Microsoft YaHei"/>
-                <a:cs typeface="Microsoft YaHei"/>
-              </a:defRPr>
-            </a:pPr>
-            <a:r>
-              <a:rPr sz="2550" b="1">
-                <a:solidFill>
-                  <a:srgbClr val="7CFFCB"/>
-                </a:solidFill>
-                <a:latin typeface="Microsoft YaHei"/>
-                <a:ea typeface="Microsoft YaHei"/>
-                <a:cs typeface="Microsoft YaHei"/>
-              </a:rPr>
-              <a:t>›</a:t>
-            </a:r>
-          </a:p>
-        </p:txBody>
-      </p:sp>
-      <p:sp>
-        <p:nvSpPr>
           <p:cNvPr id="14" name="">
             <a:extLst xmlns:a="http://schemas.openxmlformats.org/drawingml/2006/main">
               <a:ext uri="{FF2B5EF4-FFF2-40B4-BE49-F238E27FC236}">
@@ -19370,102 +19798,6 @@
       </p:sp>
       <p:sp>
         <p:nvSpPr>
-          <p:cNvPr id="16" name="">
-            <a:extLst xmlns:a="http://schemas.openxmlformats.org/drawingml/2006/main">
-              <a:ext uri="{FF2B5EF4-FFF2-40B4-BE49-F238E27FC236}">
-                <a16:creationId xmlns:a16="http://schemas.microsoft.com/office/drawing/2014/main" id="{81DFB095-838F-4401-8879-8926B1169A82}"/>
-              </a:ext>
-            </a:extLst>
-          </p:cNvPr>
-          <p:cNvSpPr>
-            <a:spLocks xmlns:a="http://schemas.openxmlformats.org/drawingml/2006/main" noGrp="1"/>
-          </p:cNvSpPr>
-          <p:nvPr/>
-        </p:nvSpPr>
-        <p:spPr>
-          <a:xfrm xmlns:a="http://schemas.openxmlformats.org/drawingml/2006/main">
-            <a:off x="7115175" y="2524125"/>
-            <a:ext cx="381000" cy="19050"/>
-          </a:xfrm>
-          <a:prstGeom xmlns:a="http://schemas.openxmlformats.org/drawingml/2006/main" prst="rect">
-            <a:avLst/>
-          </a:prstGeom>
-          <a:solidFill xmlns:a="http://schemas.openxmlformats.org/drawingml/2006/main">
-            <a:srgbClr val="F5F7FF">
-              <a:alpha val="52000"/>
-            </a:srgbClr>
-          </a:solidFill>
-          <a:ln xmlns:a="http://schemas.openxmlformats.org/drawingml/2006/main" w="0">
-            <a:noFill/>
-            <a:prstDash val="solid"/>
-          </a:ln>
-        </p:spPr>
-        <p:txBody>
-          <a:bodyPr xmlns:a="http://schemas.openxmlformats.org/drawingml/2006/main"/>
-          <a:lstStyle xmlns:a="http://schemas.openxmlformats.org/drawingml/2006/main"/>
-          <a:p xmlns:a="http://schemas.openxmlformats.org/drawingml/2006/main"/>
-        </p:txBody>
-      </p:sp>
-      <p:sp>
-        <p:nvSpPr>
-          <p:cNvPr id="17" name="">
-            <a:extLst xmlns:a="http://schemas.openxmlformats.org/drawingml/2006/main">
-              <a:ext uri="{FF2B5EF4-FFF2-40B4-BE49-F238E27FC236}">
-                <a16:creationId xmlns:a16="http://schemas.microsoft.com/office/drawing/2014/main" id="{65B92B37-8313-441D-96A5-7A8985C34D96}"/>
-              </a:ext>
-            </a:extLst>
-          </p:cNvPr>
-          <p:cNvSpPr>
-            <a:spLocks xmlns:a="http://schemas.openxmlformats.org/drawingml/2006/main" noGrp="1"/>
-          </p:cNvSpPr>
-          <p:nvPr/>
-        </p:nvSpPr>
-        <p:spPr>
-          <a:xfrm xmlns:a="http://schemas.openxmlformats.org/drawingml/2006/main">
-            <a:off x="7387590" y="2252472"/>
-            <a:ext cx="238125" cy="400050"/>
-          </a:xfrm>
-          <a:prstGeom xmlns:a="http://schemas.openxmlformats.org/drawingml/2006/main" prst="rect">
-            <a:avLst/>
-          </a:prstGeom>
-          <a:noFill xmlns:a="http://schemas.openxmlformats.org/drawingml/2006/main"/>
-          <a:ln xmlns:a="http://schemas.openxmlformats.org/drawingml/2006/main" w="0">
-            <a:noFill/>
-          </a:ln>
-        </p:spPr>
-        <p:txBody>
-          <a:bodyPr xmlns:a="http://schemas.openxmlformats.org/drawingml/2006/main">
-            <a:noAutofit/>
-          </a:bodyPr>
-          <a:lstStyle xmlns:a="http://schemas.openxmlformats.org/drawingml/2006/main"/>
-          <a:p xmlns:a="http://schemas.openxmlformats.org/drawingml/2006/main">
-            <a:pPr>
-              <a:buNone/>
-              <a:defRPr sz="2550" b="1">
-                <a:solidFill>
-                  <a:srgbClr val="7CFFCB"/>
-                </a:solidFill>
-                <a:latin typeface="Microsoft YaHei"/>
-                <a:ea typeface="Microsoft YaHei"/>
-                <a:cs typeface="Microsoft YaHei"/>
-              </a:defRPr>
-            </a:pPr>
-            <a:r>
-              <a:rPr sz="2550" b="1">
-                <a:solidFill>
-                  <a:srgbClr val="7CFFCB"/>
-                </a:solidFill>
-                <a:latin typeface="Microsoft YaHei"/>
-                <a:ea typeface="Microsoft YaHei"/>
-                <a:cs typeface="Microsoft YaHei"/>
-              </a:rPr>
-              <a:t>›</a:t>
-            </a:r>
-          </a:p>
-        </p:txBody>
-      </p:sp>
-      <p:sp>
-        <p:nvSpPr>
           <p:cNvPr id="18" name="">
             <a:extLst xmlns:a="http://schemas.openxmlformats.org/drawingml/2006/main">
               <a:ext uri="{FF2B5EF4-FFF2-40B4-BE49-F238E27FC236}">
@@ -19562,102 +19894,6 @@
                 <a:cs typeface="Microsoft YaHei"/>
               </a:rPr>
               <a:t>评分报告</a:t>
-            </a:r>
-          </a:p>
-        </p:txBody>
-      </p:sp>
-      <p:sp>
-        <p:nvSpPr>
-          <p:cNvPr id="20" name="">
-            <a:extLst xmlns:a="http://schemas.openxmlformats.org/drawingml/2006/main">
-              <a:ext uri="{FF2B5EF4-FFF2-40B4-BE49-F238E27FC236}">
-                <a16:creationId xmlns:a16="http://schemas.microsoft.com/office/drawing/2014/main" id="{9530127C-B08E-49B2-A4B4-AC655003293B}"/>
-              </a:ext>
-            </a:extLst>
-          </p:cNvPr>
-          <p:cNvSpPr>
-            <a:spLocks xmlns:a="http://schemas.openxmlformats.org/drawingml/2006/main" noGrp="1"/>
-          </p:cNvSpPr>
-          <p:nvPr/>
-        </p:nvSpPr>
-        <p:spPr>
-          <a:xfrm xmlns:a="http://schemas.openxmlformats.org/drawingml/2006/main">
-            <a:off x="9420225" y="2524125"/>
-            <a:ext cx="381000" cy="19050"/>
-          </a:xfrm>
-          <a:prstGeom xmlns:a="http://schemas.openxmlformats.org/drawingml/2006/main" prst="rect">
-            <a:avLst/>
-          </a:prstGeom>
-          <a:solidFill xmlns:a="http://schemas.openxmlformats.org/drawingml/2006/main">
-            <a:srgbClr val="F5F7FF">
-              <a:alpha val="52000"/>
-            </a:srgbClr>
-          </a:solidFill>
-          <a:ln xmlns:a="http://schemas.openxmlformats.org/drawingml/2006/main" w="0">
-            <a:noFill/>
-            <a:prstDash val="solid"/>
-          </a:ln>
-        </p:spPr>
-        <p:txBody>
-          <a:bodyPr xmlns:a="http://schemas.openxmlformats.org/drawingml/2006/main"/>
-          <a:lstStyle xmlns:a="http://schemas.openxmlformats.org/drawingml/2006/main"/>
-          <a:p xmlns:a="http://schemas.openxmlformats.org/drawingml/2006/main"/>
-        </p:txBody>
-      </p:sp>
-      <p:sp>
-        <p:nvSpPr>
-          <p:cNvPr id="21" name="">
-            <a:extLst xmlns:a="http://schemas.openxmlformats.org/drawingml/2006/main">
-              <a:ext uri="{FF2B5EF4-FFF2-40B4-BE49-F238E27FC236}">
-                <a16:creationId xmlns:a16="http://schemas.microsoft.com/office/drawing/2014/main" id="{5652995E-30A5-40E7-B6B3-D1D5C044E1A2}"/>
-              </a:ext>
-            </a:extLst>
-          </p:cNvPr>
-          <p:cNvSpPr>
-            <a:spLocks xmlns:a="http://schemas.openxmlformats.org/drawingml/2006/main" noGrp="1"/>
-          </p:cNvSpPr>
-          <p:nvPr/>
-        </p:nvSpPr>
-        <p:spPr>
-          <a:xfrm xmlns:a="http://schemas.openxmlformats.org/drawingml/2006/main">
-            <a:off x="9692640" y="2252472"/>
-            <a:ext cx="238125" cy="400050"/>
-          </a:xfrm>
-          <a:prstGeom xmlns:a="http://schemas.openxmlformats.org/drawingml/2006/main" prst="rect">
-            <a:avLst/>
-          </a:prstGeom>
-          <a:noFill xmlns:a="http://schemas.openxmlformats.org/drawingml/2006/main"/>
-          <a:ln xmlns:a="http://schemas.openxmlformats.org/drawingml/2006/main" w="0">
-            <a:noFill/>
-          </a:ln>
-        </p:spPr>
-        <p:txBody>
-          <a:bodyPr xmlns:a="http://schemas.openxmlformats.org/drawingml/2006/main">
-            <a:noAutofit/>
-          </a:bodyPr>
-          <a:lstStyle xmlns:a="http://schemas.openxmlformats.org/drawingml/2006/main"/>
-          <a:p xmlns:a="http://schemas.openxmlformats.org/drawingml/2006/main">
-            <a:pPr>
-              <a:buNone/>
-              <a:defRPr sz="2550" b="1">
-                <a:solidFill>
-                  <a:srgbClr val="7CFFCB"/>
-                </a:solidFill>
-                <a:latin typeface="Microsoft YaHei"/>
-                <a:ea typeface="Microsoft YaHei"/>
-                <a:cs typeface="Microsoft YaHei"/>
-              </a:defRPr>
-            </a:pPr>
-            <a:r>
-              <a:rPr sz="2550" b="1">
-                <a:solidFill>
-                  <a:srgbClr val="7CFFCB"/>
-                </a:solidFill>
-                <a:latin typeface="Microsoft YaHei"/>
-                <a:ea typeface="Microsoft YaHei"/>
-                <a:cs typeface="Microsoft YaHei"/>
-              </a:rPr>
-              <a:t>›</a:t>
             </a:r>
           </a:p>
         </p:txBody>
@@ -24790,6 +25026,309 @@
           </a:prstGeom>
         </p:spPr>
       </p:pic>
+      <p:sp xmlns:a="http://schemas.openxmlformats.org/drawingml/2006/main">
+        <p:nvSpPr>
+          <p:cNvPr id="14" name="Rounded Rectangle 13"/>
+          <p:cNvSpPr/>
+          <p:nvPr/>
+        </p:nvSpPr>
+        <p:spPr>
+          <a:xfrm>
+            <a:off x="1115568" y="2770632"/>
+            <a:ext cx="2267712" cy="685800"/>
+          </a:xfrm>
+          <a:prstGeom prst="roundRect">
+            <a:avLst/>
+          </a:prstGeom>
+          <a:solidFill>
+            <a:srgbClr val="081A2C"/>
+          </a:solidFill>
+          <a:ln w="10160">
+            <a:solidFill>
+              <a:srgbClr val="2F5D6D"/>
+            </a:solidFill>
+          </a:ln>
+        </p:spPr>
+        <p:style>
+          <a:lnRef idx="1">
+            <a:schemeClr val="accent1"/>
+          </a:lnRef>
+          <a:fillRef idx="3">
+            <a:schemeClr val="accent1"/>
+          </a:fillRef>
+          <a:effectRef idx="2">
+            <a:schemeClr val="accent1"/>
+          </a:effectRef>
+          <a:fontRef idx="minor">
+            <a:schemeClr val="lt1"/>
+          </a:fontRef>
+        </p:style>
+        <p:txBody>
+          <a:bodyPr rtlCol="0" anchor="ctr"/>
+          <a:lstStyle/>
+          <a:p>
+            <a:pPr algn="ctr"/>
+          </a:p>
+        </p:txBody>
+      </p:sp>
+      <p:sp xmlns:a="http://schemas.openxmlformats.org/drawingml/2006/main">
+        <p:nvSpPr>
+          <p:cNvPr id="15" name="Trapezoid 14"/>
+          <p:cNvSpPr/>
+          <p:nvPr/>
+        </p:nvSpPr>
+        <p:spPr>
+          <a:xfrm>
+            <a:off x="1600200" y="2898648"/>
+            <a:ext cx="1316736" cy="246888"/>
+          </a:xfrm>
+          <a:prstGeom prst="trapezoid">
+            <a:avLst/>
+          </a:prstGeom>
+          <a:solidFill>
+            <a:srgbClr val="123540"/>
+          </a:solidFill>
+          <a:ln w="25400">
+            <a:solidFill>
+              <a:srgbClr val="71FFD7"/>
+            </a:solidFill>
+          </a:ln>
+        </p:spPr>
+        <p:style>
+          <a:lnRef idx="1">
+            <a:schemeClr val="accent1"/>
+          </a:lnRef>
+          <a:fillRef idx="3">
+            <a:schemeClr val="accent1"/>
+          </a:fillRef>
+          <a:effectRef idx="2">
+            <a:schemeClr val="accent1"/>
+          </a:effectRef>
+          <a:fontRef idx="minor">
+            <a:schemeClr val="lt1"/>
+          </a:fontRef>
+        </p:style>
+        <p:txBody>
+          <a:bodyPr rtlCol="0" anchor="ctr"/>
+          <a:lstStyle/>
+          <a:p>
+            <a:pPr algn="ctr"/>
+          </a:p>
+        </p:txBody>
+      </p:sp>
+      <p:sp xmlns:a="http://schemas.openxmlformats.org/drawingml/2006/main">
+        <p:nvSpPr>
+          <p:cNvPr id="16" name="Rounded Rectangle 15"/>
+          <p:cNvSpPr/>
+          <p:nvPr/>
+        </p:nvSpPr>
+        <p:spPr>
+          <a:xfrm>
+            <a:off x="1280160" y="3108960"/>
+            <a:ext cx="1956816" cy="210312"/>
+          </a:xfrm>
+          <a:prstGeom prst="roundRect">
+            <a:avLst/>
+          </a:prstGeom>
+          <a:solidFill>
+            <a:srgbClr val="123540"/>
+          </a:solidFill>
+          <a:ln w="25400">
+            <a:solidFill>
+              <a:srgbClr val="71FFD7"/>
+            </a:solidFill>
+          </a:ln>
+        </p:spPr>
+        <p:style>
+          <a:lnRef idx="1">
+            <a:schemeClr val="accent1"/>
+          </a:lnRef>
+          <a:fillRef idx="3">
+            <a:schemeClr val="accent1"/>
+          </a:fillRef>
+          <a:effectRef idx="2">
+            <a:schemeClr val="accent1"/>
+          </a:effectRef>
+          <a:fontRef idx="minor">
+            <a:schemeClr val="lt1"/>
+          </a:fontRef>
+        </p:style>
+        <p:txBody>
+          <a:bodyPr rtlCol="0" anchor="ctr"/>
+          <a:lstStyle/>
+          <a:p>
+            <a:pPr algn="ctr"/>
+          </a:p>
+        </p:txBody>
+      </p:sp>
+      <p:cxnSp xmlns:a="http://schemas.openxmlformats.org/drawingml/2006/main">
+        <p:nvCxnSpPr>
+          <p:cNvPr id="17" name="Connector 16"/>
+          <p:cNvCxnSpPr/>
+          <p:nvPr/>
+        </p:nvCxnSpPr>
+        <p:spPr>
+          <a:xfrm>
+            <a:off x="2249424" y="2926080"/>
+            <a:ext cx="0" cy="182880"/>
+          </a:xfrm>
+          <a:prstGeom prst="line">
+            <a:avLst/>
+          </a:prstGeom>
+          <a:ln w="19050">
+            <a:solidFill>
+              <a:srgbClr val="71FFD7"/>
+            </a:solidFill>
+          </a:ln>
+        </p:spPr>
+        <p:style>
+          <a:lnRef idx="2">
+            <a:schemeClr val="accent1"/>
+          </a:lnRef>
+          <a:fillRef idx="0">
+            <a:schemeClr val="accent1"/>
+          </a:fillRef>
+          <a:effectRef idx="1">
+            <a:schemeClr val="accent1"/>
+          </a:effectRef>
+          <a:fontRef idx="minor">
+            <a:schemeClr val="tx1"/>
+          </a:fontRef>
+        </p:style>
+      </p:cxnSp>
+      <p:sp xmlns:a="http://schemas.openxmlformats.org/drawingml/2006/main">
+        <p:nvSpPr>
+          <p:cNvPr id="18" name="Oval 17"/>
+          <p:cNvSpPr/>
+          <p:nvPr/>
+        </p:nvSpPr>
+        <p:spPr>
+          <a:xfrm>
+            <a:off x="1554480" y="3255264"/>
+            <a:ext cx="210312" cy="192024"/>
+          </a:xfrm>
+          <a:prstGeom prst="ellipse">
+            <a:avLst/>
+          </a:prstGeom>
+          <a:solidFill>
+            <a:srgbClr val="081A2C"/>
+          </a:solidFill>
+          <a:ln w="25400">
+            <a:solidFill>
+              <a:srgbClr val="71FFD7"/>
+            </a:solidFill>
+          </a:ln>
+        </p:spPr>
+        <p:style>
+          <a:lnRef idx="1">
+            <a:schemeClr val="accent1"/>
+          </a:lnRef>
+          <a:fillRef idx="3">
+            <a:schemeClr val="accent1"/>
+          </a:fillRef>
+          <a:effectRef idx="2">
+            <a:schemeClr val="accent1"/>
+          </a:effectRef>
+          <a:fontRef idx="minor">
+            <a:schemeClr val="lt1"/>
+          </a:fontRef>
+        </p:style>
+        <p:txBody>
+          <a:bodyPr rtlCol="0" anchor="ctr"/>
+          <a:lstStyle/>
+          <a:p>
+            <a:pPr algn="ctr"/>
+          </a:p>
+        </p:txBody>
+      </p:sp>
+      <p:sp xmlns:a="http://schemas.openxmlformats.org/drawingml/2006/main">
+        <p:nvSpPr>
+          <p:cNvPr id="19" name="Oval 18"/>
+          <p:cNvSpPr/>
+          <p:nvPr/>
+        </p:nvSpPr>
+        <p:spPr>
+          <a:xfrm>
+            <a:off x="2761488" y="3255264"/>
+            <a:ext cx="210312" cy="192024"/>
+          </a:xfrm>
+          <a:prstGeom prst="ellipse">
+            <a:avLst/>
+          </a:prstGeom>
+          <a:solidFill>
+            <a:srgbClr val="081A2C"/>
+          </a:solidFill>
+          <a:ln w="25400">
+            <a:solidFill>
+              <a:srgbClr val="71FFD7"/>
+            </a:solidFill>
+          </a:ln>
+        </p:spPr>
+        <p:style>
+          <a:lnRef idx="1">
+            <a:schemeClr val="accent1"/>
+          </a:lnRef>
+          <a:fillRef idx="3">
+            <a:schemeClr val="accent1"/>
+          </a:fillRef>
+          <a:effectRef idx="2">
+            <a:schemeClr val="accent1"/>
+          </a:effectRef>
+          <a:fontRef idx="minor">
+            <a:schemeClr val="lt1"/>
+          </a:fontRef>
+        </p:style>
+        <p:txBody>
+          <a:bodyPr rtlCol="0" anchor="ctr"/>
+          <a:lstStyle/>
+          <a:p>
+            <a:pPr algn="ctr"/>
+          </a:p>
+        </p:txBody>
+      </p:sp>
+      <p:sp xmlns:a="http://schemas.openxmlformats.org/drawingml/2006/main">
+        <p:nvSpPr>
+          <p:cNvPr id="20" name="Rectangle 19"/>
+          <p:cNvSpPr/>
+          <p:nvPr/>
+        </p:nvSpPr>
+        <p:spPr>
+          <a:xfrm>
+            <a:off x="3163824" y="3154680"/>
+            <a:ext cx="64008" cy="64008"/>
+          </a:xfrm>
+          <a:prstGeom prst="rect">
+            <a:avLst/>
+          </a:prstGeom>
+          <a:solidFill>
+            <a:srgbClr val="71FFD7"/>
+          </a:solidFill>
+          <a:ln>
+            <a:noFill/>
+          </a:ln>
+        </p:spPr>
+        <p:style>
+          <a:lnRef idx="1">
+            <a:schemeClr val="accent1"/>
+          </a:lnRef>
+          <a:fillRef idx="3">
+            <a:schemeClr val="accent1"/>
+          </a:fillRef>
+          <a:effectRef idx="2">
+            <a:schemeClr val="accent1"/>
+          </a:effectRef>
+          <a:fontRef idx="minor">
+            <a:schemeClr val="lt1"/>
+          </a:fontRef>
+        </p:style>
+        <p:txBody>
+          <a:bodyPr rtlCol="0" anchor="ctr"/>
+          <a:lstStyle/>
+          <a:p>
+            <a:pPr algn="ctr"/>
+          </a:p>
+        </p:txBody>
+      </p:sp>
     </p:spTree>
     <p:extLst>
       <p:ext uri="{BB962C8B-B14F-4D97-AF65-F5344CB8AC3E}">
